--- a/Pubtex_現状ロジック.pptx
+++ b/Pubtex_現状ロジック.pptx
@@ -920,17 +920,17 @@
               <a:buNone/>
             </a:pPr>
             <a:r>
-              <a:rPr lang="en-US" sz="1000" b="1" spc="300" kern="0" dirty="0">
+              <a:rPr lang="ja-JP" altLang="en-US" sz="1000" b="1" spc="300" kern="0" dirty="0">
                 <a:solidFill>
                   <a:srgbClr val="B08D57"/>
                 </a:solidFill>
-                <a:latin typeface="Yu Gothic" pitchFamily="34" charset="0"/>
-                <a:ea typeface="Yu Gothic" pitchFamily="34" charset="-122"/>
-                <a:cs typeface="Yu Gothic" pitchFamily="34" charset="-120"/>
+                <a:latin typeface="Hiragino Kaku Gothic ProN" pitchFamily="34" charset="0"/>
+                <a:ea typeface="Hiragino Kaku Gothic ProN" pitchFamily="34" charset="-122"/>
+                <a:cs typeface="Hiragino Kaku Gothic ProN" pitchFamily="34" charset="-120"/>
               </a:rPr>
               <a:t>PUBTEX ｜ SALES FORECAST SIMULATOR</a:t>
             </a:r>
-            <a:endParaRPr lang="en-US" sz="1000" dirty="0"/>
+            <a:endParaRPr lang="ja-JP" sz="1000" dirty="0"/>
           </a:p>
         </p:txBody>
       </p:sp>
@@ -959,17 +959,17 @@
               <a:buNone/>
             </a:pPr>
             <a:r>
-              <a:rPr lang="en-US" sz="2300" b="1" dirty="0">
+              <a:rPr lang="ja-JP" altLang="en-US" sz="2300" b="1" dirty="0">
                 <a:solidFill>
                   <a:srgbClr val="23314F"/>
                 </a:solidFill>
-                <a:latin typeface="Yu Gothic" pitchFamily="34" charset="0"/>
-                <a:ea typeface="Yu Gothic" pitchFamily="34" charset="-122"/>
-                <a:cs typeface="Yu Gothic" pitchFamily="34" charset="-120"/>
+                <a:latin typeface="Hiragino Kaku Gothic ProN" pitchFamily="34" charset="0"/>
+                <a:ea typeface="Hiragino Kaku Gothic ProN" pitchFamily="34" charset="-122"/>
+                <a:cs typeface="Hiragino Kaku Gothic ProN" pitchFamily="34" charset="-120"/>
               </a:rPr>
               <a:t>出版物 売れ行き予測シミュレーター ― 現状ロジック</a:t>
             </a:r>
-            <a:endParaRPr lang="en-US" sz="2300" dirty="0"/>
+            <a:endParaRPr lang="ja-JP" sz="2300" dirty="0"/>
           </a:p>
         </p:txBody>
       </p:sp>
@@ -998,17 +998,17 @@
               <a:buNone/>
             </a:pPr>
             <a:r>
-              <a:rPr lang="en-US" sz="1200" dirty="0">
+              <a:rPr lang="ja-JP" altLang="en-US" sz="1200" dirty="0">
                 <a:solidFill>
                   <a:srgbClr val="737D90"/>
                 </a:solidFill>
-                <a:latin typeface="Yu Gothic" pitchFamily="34" charset="0"/>
-                <a:ea typeface="Yu Gothic" pitchFamily="34" charset="-122"/>
-                <a:cs typeface="Yu Gothic" pitchFamily="34" charset="-120"/>
+                <a:latin typeface="Hiragino Kaku Gothic ProN" pitchFamily="34" charset="0"/>
+                <a:ea typeface="Hiragino Kaku Gothic ProN" pitchFamily="34" charset="-122"/>
+                <a:cs typeface="Hiragino Kaku Gothic ProN" pitchFamily="34" charset="-120"/>
               </a:rPr>
               <a:t>前フェーズ成果物の処理フローと重要ポイントの整理</a:t>
             </a:r>
-            <a:endParaRPr lang="en-US" sz="1200" dirty="0"/>
+            <a:endParaRPr lang="ja-JP" sz="1200" dirty="0"/>
           </a:p>
         </p:txBody>
       </p:sp>
@@ -1062,17 +1062,17 @@
               <a:buNone/>
             </a:pPr>
             <a:r>
-              <a:rPr lang="en-US" sz="950" dirty="0">
+              <a:rPr lang="ja-JP" altLang="en-US" sz="950" dirty="0">
                 <a:solidFill>
                   <a:srgbClr val="737D90"/>
                 </a:solidFill>
-                <a:latin typeface="Yu Gothic" pitchFamily="34" charset="0"/>
-                <a:ea typeface="Yu Gothic" pitchFamily="34" charset="-122"/>
-                <a:cs typeface="Yu Gothic" pitchFamily="34" charset="-120"/>
+                <a:latin typeface="Hiragino Kaku Gothic ProN" pitchFamily="34" charset="0"/>
+                <a:ea typeface="Hiragino Kaku Gothic ProN" pitchFamily="34" charset="-122"/>
+                <a:cs typeface="Hiragino Kaku Gothic ProN" pitchFamily="34" charset="-120"/>
               </a:rPr>
               <a:t>本フェーズ：内容理解 → 売上予測</a:t>
             </a:r>
-            <a:endParaRPr lang="en-US" sz="950" dirty="0"/>
+            <a:endParaRPr lang="ja-JP" sz="950" dirty="0"/>
           </a:p>
         </p:txBody>
       </p:sp>
@@ -1149,13 +1149,13 @@
               <a:buNone/>
             </a:pPr>
             <a:r>
-              <a:rPr lang="en-US" sz="1250" b="1" dirty="0">
+              <a:rPr lang="ja-JP" altLang="en-US" sz="1250" b="1" dirty="0">
                 <a:solidFill>
                   <a:srgbClr val="23314F"/>
                 </a:solidFill>
-                <a:latin typeface="Yu Gothic" pitchFamily="34" charset="0"/>
-                <a:ea typeface="Yu Gothic" pitchFamily="34" charset="-122"/>
-                <a:cs typeface="Yu Gothic" pitchFamily="34" charset="-120"/>
+                <a:latin typeface="Hiragino Kaku Gothic ProN" pitchFamily="34" charset="0"/>
+                <a:ea typeface="Hiragino Kaku Gothic ProN" pitchFamily="34" charset="-122"/>
+                <a:cs typeface="Hiragino Kaku Gothic ProN" pitchFamily="34" charset="-120"/>
               </a:rPr>
               <a:t>予測ターゲット＝新刊（販売実績ゼロ）の店舗別売上。</a:t>
             </a:r>
@@ -1166,13 +1166,13 @@
               <a:buNone/>
             </a:pPr>
             <a:r>
-              <a:rPr lang="en-US" sz="1250" dirty="0">
+              <a:rPr lang="ja-JP" altLang="en-US" sz="1250" dirty="0">
                 <a:solidFill>
                   <a:srgbClr val="1D2536"/>
                 </a:solidFill>
-                <a:latin typeface="Yu Gothic" pitchFamily="34" charset="0"/>
-                <a:ea typeface="Yu Gothic" pitchFamily="34" charset="-122"/>
-                <a:cs typeface="Yu Gothic" pitchFamily="34" charset="-120"/>
+                <a:latin typeface="Hiragino Kaku Gothic ProN" pitchFamily="34" charset="0"/>
+                <a:ea typeface="Hiragino Kaku Gothic ProN" pitchFamily="34" charset="-122"/>
+                <a:cs typeface="Hiragino Kaku Gothic ProN" pitchFamily="34" charset="-120"/>
               </a:rPr>
               <a:t>実績のない新刊を、</a:t>
             </a:r>
@@ -1183,13 +1183,13 @@
               <a:buNone/>
             </a:pPr>
             <a:r>
-              <a:rPr lang="en-US" sz="1250" b="1" dirty="0">
+              <a:rPr lang="ja-JP" altLang="en-US" sz="1250" b="1" dirty="0">
                 <a:solidFill>
                   <a:srgbClr val="23314F"/>
                 </a:solidFill>
-                <a:latin typeface="Yu Gothic" pitchFamily="34" charset="0"/>
-                <a:ea typeface="Yu Gothic" pitchFamily="34" charset="-122"/>
-                <a:cs typeface="Yu Gothic" pitchFamily="34" charset="-120"/>
+                <a:latin typeface="Hiragino Kaku Gothic ProN" pitchFamily="34" charset="0"/>
+                <a:ea typeface="Hiragino Kaku Gothic ProN" pitchFamily="34" charset="-122"/>
+                <a:cs typeface="Hiragino Kaku Gothic ProN" pitchFamily="34" charset="-120"/>
               </a:rPr>
               <a:t>内容が似た既存本の販売パターンに当てはめて</a:t>
             </a:r>
@@ -1200,17 +1200,17 @@
               <a:buNone/>
             </a:pPr>
             <a:r>
-              <a:rPr lang="en-US" sz="1250" dirty="0">
+              <a:rPr lang="ja-JP" altLang="en-US" sz="1250" dirty="0">
                 <a:solidFill>
                   <a:srgbClr val="1D2536"/>
                 </a:solidFill>
-                <a:latin typeface="Yu Gothic" pitchFamily="34" charset="0"/>
-                <a:ea typeface="Yu Gothic" pitchFamily="34" charset="-122"/>
-                <a:cs typeface="Yu Gothic" pitchFamily="34" charset="-120"/>
+                <a:latin typeface="Hiragino Kaku Gothic ProN" pitchFamily="34" charset="0"/>
+                <a:ea typeface="Hiragino Kaku Gothic ProN" pitchFamily="34" charset="-122"/>
+                <a:cs typeface="Hiragino Kaku Gothic ProN" pitchFamily="34" charset="-120"/>
               </a:rPr>
               <a:t>予測する（コールドスタート対策）ことが本ロジックの狙い。</a:t>
             </a:r>
-            <a:endParaRPr lang="en-US" sz="1250" dirty="0"/>
+            <a:endParaRPr lang="ja-JP" sz="1250" dirty="0"/>
           </a:p>
         </p:txBody>
       </p:sp>
@@ -1239,13 +1239,13 @@
               <a:buNone/>
             </a:pPr>
             <a:r>
-              <a:rPr lang="en-US" sz="1050" dirty="0">
+              <a:rPr lang="ja-JP" altLang="en-US" sz="1050" dirty="0">
                 <a:solidFill>
                   <a:srgbClr val="737D90"/>
                 </a:solidFill>
-                <a:latin typeface="Yu Gothic" pitchFamily="34" charset="0"/>
-                <a:ea typeface="Yu Gothic" pitchFamily="34" charset="-122"/>
-                <a:cs typeface="Yu Gothic" pitchFamily="34" charset="-120"/>
+                <a:latin typeface="Hiragino Kaku Gothic ProN" pitchFamily="34" charset="0"/>
+                <a:ea typeface="Hiragino Kaku Gothic ProN" pitchFamily="34" charset="-122"/>
+                <a:cs typeface="Hiragino Kaku Gothic ProN" pitchFamily="34" charset="-120"/>
               </a:rPr>
               <a:t>最終出力＝</a:t>
             </a:r>
@@ -1253,13 +1253,13 @@
               <a:buNone/>
             </a:pPr>
             <a:r>
-              <a:rPr lang="en-US" sz="1050" b="1" dirty="0">
+              <a:rPr lang="ja-JP" altLang="en-US" sz="1050" b="1" dirty="0">
                 <a:solidFill>
                   <a:srgbClr val="B08D57"/>
                 </a:solidFill>
-                <a:latin typeface="Yu Gothic" pitchFamily="34" charset="0"/>
-                <a:ea typeface="Yu Gothic" pitchFamily="34" charset="-122"/>
-                <a:cs typeface="Yu Gothic" pitchFamily="34" charset="-120"/>
+                <a:latin typeface="Hiragino Kaku Gothic ProN" pitchFamily="34" charset="0"/>
+                <a:ea typeface="Hiragino Kaku Gothic ProN" pitchFamily="34" charset="-122"/>
+                <a:cs typeface="Hiragino Kaku Gothic ProN" pitchFamily="34" charset="-120"/>
               </a:rPr>
               <a:t>新刊 × 店舗 の販売冊数</a:t>
             </a:r>
@@ -1267,17 +1267,17 @@
               <a:buNone/>
             </a:pPr>
             <a:r>
-              <a:rPr lang="en-US" sz="1050" dirty="0">
+              <a:rPr lang="ja-JP" altLang="en-US" sz="1050" dirty="0">
                 <a:solidFill>
                   <a:srgbClr val="737D90"/>
                 </a:solidFill>
-                <a:latin typeface="Yu Gothic" pitchFamily="34" charset="0"/>
-                <a:ea typeface="Yu Gothic" pitchFamily="34" charset="-122"/>
-                <a:cs typeface="Yu Gothic" pitchFamily="34" charset="-120"/>
+                <a:latin typeface="Hiragino Kaku Gothic ProN" pitchFamily="34" charset="0"/>
+                <a:ea typeface="Hiragino Kaku Gothic ProN" pitchFamily="34" charset="-122"/>
+                <a:cs typeface="Hiragino Kaku Gothic ProN" pitchFamily="34" charset="-120"/>
               </a:rPr>
               <a:t>　／　配本数の決定（最適化層）は次フェーズ</a:t>
             </a:r>
-            <a:endParaRPr lang="en-US" sz="1050" dirty="0"/>
+            <a:endParaRPr lang="ja-JP" sz="1050" dirty="0"/>
           </a:p>
         </p:txBody>
       </p:sp>
@@ -1306,17 +1306,17 @@
               <a:buNone/>
             </a:pPr>
             <a:r>
-              <a:rPr lang="en-US" sz="1000" b="1" spc="250" kern="0" dirty="0">
+              <a:rPr lang="ja-JP" altLang="en-US" sz="1000" b="1" spc="250" kern="0" dirty="0">
                 <a:solidFill>
                   <a:srgbClr val="AEB6C4"/>
                 </a:solidFill>
-                <a:latin typeface="Yu Gothic" pitchFamily="34" charset="0"/>
-                <a:ea typeface="Yu Gothic" pitchFamily="34" charset="-122"/>
-                <a:cs typeface="Yu Gothic" pitchFamily="34" charset="-120"/>
+                <a:latin typeface="Hiragino Kaku Gothic ProN" pitchFamily="34" charset="0"/>
+                <a:ea typeface="Hiragino Kaku Gothic ProN" pitchFamily="34" charset="-122"/>
+                <a:cs typeface="Hiragino Kaku Gothic ProN" pitchFamily="34" charset="-120"/>
               </a:rPr>
               <a:t>STEP 01–05 ｜ コンテンツのクラスタリング</a:t>
             </a:r>
-            <a:endParaRPr lang="en-US" sz="1000" dirty="0"/>
+            <a:endParaRPr lang="ja-JP" sz="1000" dirty="0"/>
           </a:p>
         </p:txBody>
       </p:sp>
@@ -1460,17 +1460,17 @@
               <a:buNone/>
             </a:pPr>
             <a:r>
-              <a:rPr lang="en-US" sz="1400" b="1" dirty="0">
+              <a:rPr lang="ja-JP" altLang="en-US" sz="1400" b="1" dirty="0">
                 <a:solidFill>
                   <a:srgbClr val="23314F"/>
                 </a:solidFill>
-                <a:latin typeface="Yu Gothic" pitchFamily="34" charset="0"/>
-                <a:ea typeface="Yu Gothic" pitchFamily="34" charset="-122"/>
-                <a:cs typeface="Yu Gothic" pitchFamily="34" charset="-120"/>
+                <a:latin typeface="Hiragino Kaku Gothic ProN" pitchFamily="34" charset="0"/>
+                <a:ea typeface="Hiragino Kaku Gothic ProN" pitchFamily="34" charset="-122"/>
+                <a:cs typeface="Hiragino Kaku Gothic ProN" pitchFamily="34" charset="-120"/>
               </a:rPr>
               <a:t>01</a:t>
             </a:r>
-            <a:endParaRPr lang="en-US" sz="1400" dirty="0"/>
+            <a:endParaRPr lang="ja-JP" sz="1400" dirty="0"/>
           </a:p>
         </p:txBody>
       </p:sp>
@@ -1502,17 +1502,17 @@
               <a:buNone/>
             </a:pPr>
             <a:r>
-              <a:rPr lang="en-US" sz="1250" b="1" dirty="0">
+              <a:rPr lang="ja-JP" altLang="en-US" sz="1250" b="1" dirty="0">
                 <a:solidFill>
                   <a:srgbClr val="1D2536"/>
                 </a:solidFill>
-                <a:latin typeface="Yu Gothic" pitchFamily="34" charset="0"/>
-                <a:ea typeface="Yu Gothic" pitchFamily="34" charset="-122"/>
-                <a:cs typeface="Yu Gothic" pitchFamily="34" charset="-120"/>
+                <a:latin typeface="Hiragino Kaku Gothic ProN" pitchFamily="34" charset="0"/>
+                <a:ea typeface="Hiragino Kaku Gothic ProN" pitchFamily="34" charset="-122"/>
+                <a:cs typeface="Hiragino Kaku Gothic ProN" pitchFamily="34" charset="-120"/>
               </a:rPr>
               <a:t>概要文（約400字）</a:t>
             </a:r>
-            <a:endParaRPr lang="en-US" sz="1250" dirty="0"/>
+            <a:endParaRPr lang="ja-JP" sz="1250" dirty="0"/>
           </a:p>
         </p:txBody>
       </p:sp>
@@ -1544,17 +1544,17 @@
               <a:buNone/>
             </a:pPr>
             <a:r>
-              <a:rPr lang="en-US" sz="950" dirty="0">
+              <a:rPr lang="ja-JP" altLang="en-US" sz="950" dirty="0">
                 <a:solidFill>
                   <a:srgbClr val="737D90"/>
                 </a:solidFill>
-                <a:latin typeface="Yu Gothic" pitchFamily="34" charset="0"/>
-                <a:ea typeface="Yu Gothic" pitchFamily="34" charset="-122"/>
-                <a:cs typeface="Yu Gothic" pitchFamily="34" charset="-120"/>
+                <a:latin typeface="Hiragino Kaku Gothic ProN" pitchFamily="34" charset="0"/>
+                <a:ea typeface="Hiragino Kaku Gothic ProN" pitchFamily="34" charset="-122"/>
+                <a:cs typeface="Hiragino Kaku Gothic ProN" pitchFamily="34" charset="-120"/>
               </a:rPr>
               <a:t>各出版物の内容記述をテキスト入力として取得。</a:t>
             </a:r>
-            <a:endParaRPr lang="en-US" sz="950" dirty="0"/>
+            <a:endParaRPr lang="ja-JP" sz="950" dirty="0"/>
           </a:p>
         </p:txBody>
       </p:sp>
@@ -1583,17 +1583,17 @@
               <a:buNone/>
             </a:pPr>
             <a:r>
-              <a:rPr lang="en-US" sz="1400" b="1" dirty="0">
+              <a:rPr lang="ja-JP" altLang="en-US" sz="1400" b="1" dirty="0">
                 <a:solidFill>
                   <a:srgbClr val="23314F"/>
                 </a:solidFill>
-                <a:latin typeface="Yu Gothic" pitchFamily="34" charset="0"/>
-                <a:ea typeface="Yu Gothic" pitchFamily="34" charset="-122"/>
-                <a:cs typeface="Yu Gothic" pitchFamily="34" charset="-120"/>
+                <a:latin typeface="Hiragino Kaku Gothic ProN" pitchFamily="34" charset="0"/>
+                <a:ea typeface="Hiragino Kaku Gothic ProN" pitchFamily="34" charset="-122"/>
+                <a:cs typeface="Hiragino Kaku Gothic ProN" pitchFamily="34" charset="-120"/>
               </a:rPr>
               <a:t>02</a:t>
             </a:r>
-            <a:endParaRPr lang="en-US" sz="1400" dirty="0"/>
+            <a:endParaRPr lang="ja-JP" sz="1400" dirty="0"/>
           </a:p>
         </p:txBody>
       </p:sp>
@@ -1625,17 +1625,17 @@
               <a:buNone/>
             </a:pPr>
             <a:r>
-              <a:rPr lang="en-US" sz="1250" b="1" dirty="0">
+              <a:rPr lang="ja-JP" altLang="en-US" sz="1250" b="1" dirty="0">
                 <a:solidFill>
                   <a:srgbClr val="1D2536"/>
                 </a:solidFill>
-                <a:latin typeface="Yu Gothic" pitchFamily="34" charset="0"/>
-                <a:ea typeface="Yu Gothic" pitchFamily="34" charset="-122"/>
-                <a:cs typeface="Yu Gothic" pitchFamily="34" charset="-120"/>
+                <a:latin typeface="Hiragino Kaku Gothic ProN" pitchFamily="34" charset="0"/>
+                <a:ea typeface="Hiragino Kaku Gothic ProN" pitchFamily="34" charset="-122"/>
+                <a:cs typeface="Hiragino Kaku Gothic ProN" pitchFamily="34" charset="-120"/>
               </a:rPr>
               <a:t>Embedding</a:t>
             </a:r>
-            <a:endParaRPr lang="en-US" sz="1250" dirty="0"/>
+            <a:endParaRPr lang="ja-JP" sz="1250" dirty="0"/>
           </a:p>
         </p:txBody>
       </p:sp>
@@ -1667,17 +1667,17 @@
               <a:buNone/>
             </a:pPr>
             <a:r>
-              <a:rPr lang="en-US" sz="950" dirty="0">
+              <a:rPr lang="ja-JP" altLang="en-US" sz="950" dirty="0">
                 <a:solidFill>
                   <a:srgbClr val="737D90"/>
                 </a:solidFill>
-                <a:latin typeface="Yu Gothic" pitchFamily="34" charset="0"/>
-                <a:ea typeface="Yu Gothic" pitchFamily="34" charset="-122"/>
-                <a:cs typeface="Yu Gothic" pitchFamily="34" charset="-120"/>
+                <a:latin typeface="Hiragino Kaku Gothic ProN" pitchFamily="34" charset="0"/>
+                <a:ea typeface="Hiragino Kaku Gothic ProN" pitchFamily="34" charset="-122"/>
+                <a:cs typeface="Hiragino Kaku Gothic ProN" pitchFamily="34" charset="-120"/>
               </a:rPr>
               <a:t>言語モデルで概要文を意味ベクトルへ写像。</a:t>
             </a:r>
-            <a:endParaRPr lang="en-US" sz="950" dirty="0"/>
+            <a:endParaRPr lang="ja-JP" sz="950" dirty="0"/>
           </a:p>
         </p:txBody>
       </p:sp>
@@ -1729,13 +1729,13 @@
               <a:buNone/>
             </a:pPr>
             <a:r>
-              <a:rPr lang="en-US" sz="900" b="1" dirty="0">
+              <a:rPr lang="ja-JP" altLang="en-US" sz="900" b="1" dirty="0">
                 <a:solidFill>
                   <a:srgbClr val="5D4E30"/>
                 </a:solidFill>
-                <a:latin typeface="Yu Gothic" pitchFamily="34" charset="0"/>
-                <a:ea typeface="Yu Gothic" pitchFamily="34" charset="-122"/>
-                <a:cs typeface="Yu Gothic" pitchFamily="34" charset="-120"/>
+                <a:latin typeface="Hiragino Kaku Gothic ProN" pitchFamily="34" charset="0"/>
+                <a:ea typeface="Hiragino Kaku Gothic ProN" pitchFamily="34" charset="-122"/>
+                <a:cs typeface="Hiragino Kaku Gothic ProN" pitchFamily="34" charset="-120"/>
               </a:rPr>
               <a:t>前処理が鍵。</a:t>
             </a:r>
@@ -1746,17 +1746,17 @@
               <a:buNone/>
             </a:pPr>
             <a:r>
-              <a:rPr lang="en-US" sz="900" dirty="0">
+              <a:rPr lang="ja-JP" altLang="en-US" sz="900" dirty="0">
                 <a:solidFill>
                   <a:srgbClr val="5D4E30"/>
                 </a:solidFill>
-                <a:latin typeface="Yu Gothic" pitchFamily="34" charset="0"/>
-                <a:ea typeface="Yu Gothic" pitchFamily="34" charset="-122"/>
-                <a:cs typeface="Yu Gothic" pitchFamily="34" charset="-120"/>
+                <a:latin typeface="Hiragino Kaku Gothic ProN" pitchFamily="34" charset="0"/>
+                <a:ea typeface="Hiragino Kaku Gothic ProN" pitchFamily="34" charset="-122"/>
+                <a:cs typeface="Hiragino Kaku Gothic ProN" pitchFamily="34" charset="-120"/>
               </a:rPr>
               <a:t>正規化＋次元圧縮（PCA / UMAP）を推奨。</a:t>
             </a:r>
-            <a:endParaRPr lang="en-US" sz="900" dirty="0"/>
+            <a:endParaRPr lang="ja-JP" sz="900" dirty="0"/>
           </a:p>
         </p:txBody>
       </p:sp>
@@ -1785,17 +1785,17 @@
               <a:buNone/>
             </a:pPr>
             <a:r>
-              <a:rPr lang="en-US" sz="1400" b="1" dirty="0">
+              <a:rPr lang="ja-JP" altLang="en-US" sz="1400" b="1" dirty="0">
                 <a:solidFill>
                   <a:srgbClr val="23314F"/>
                 </a:solidFill>
-                <a:latin typeface="Yu Gothic" pitchFamily="34" charset="0"/>
-                <a:ea typeface="Yu Gothic" pitchFamily="34" charset="-122"/>
-                <a:cs typeface="Yu Gothic" pitchFamily="34" charset="-120"/>
+                <a:latin typeface="Hiragino Kaku Gothic ProN" pitchFamily="34" charset="0"/>
+                <a:ea typeface="Hiragino Kaku Gothic ProN" pitchFamily="34" charset="-122"/>
+                <a:cs typeface="Hiragino Kaku Gothic ProN" pitchFamily="34" charset="-120"/>
               </a:rPr>
               <a:t>03</a:t>
             </a:r>
-            <a:endParaRPr lang="en-US" sz="1400" dirty="0"/>
+            <a:endParaRPr lang="ja-JP" sz="1400" dirty="0"/>
           </a:p>
         </p:txBody>
       </p:sp>
@@ -1827,17 +1827,17 @@
               <a:buNone/>
             </a:pPr>
             <a:r>
-              <a:rPr lang="en-US" sz="1250" b="1" dirty="0">
+              <a:rPr lang="ja-JP" altLang="en-US" sz="1250" b="1" dirty="0">
                 <a:solidFill>
                   <a:srgbClr val="1D2536"/>
                 </a:solidFill>
-                <a:latin typeface="Yu Gothic" pitchFamily="34" charset="0"/>
-                <a:ea typeface="Yu Gothic" pitchFamily="34" charset="-122"/>
-                <a:cs typeface="Yu Gothic" pitchFamily="34" charset="-120"/>
+                <a:latin typeface="Hiragino Kaku Gothic ProN" pitchFamily="34" charset="0"/>
+                <a:ea typeface="Hiragino Kaku Gothic ProN" pitchFamily="34" charset="-122"/>
+                <a:cs typeface="Hiragino Kaku Gothic ProN" pitchFamily="34" charset="-120"/>
               </a:rPr>
               <a:t>KMeans クラスタリング</a:t>
             </a:r>
-            <a:endParaRPr lang="en-US" sz="1250" dirty="0"/>
+            <a:endParaRPr lang="ja-JP" sz="1250" dirty="0"/>
           </a:p>
         </p:txBody>
       </p:sp>
@@ -1869,17 +1869,17 @@
               <a:buNone/>
             </a:pPr>
             <a:r>
-              <a:rPr lang="en-US" sz="950" dirty="0">
+              <a:rPr lang="ja-JP" altLang="en-US" sz="950" dirty="0">
                 <a:solidFill>
                   <a:srgbClr val="737D90"/>
                 </a:solidFill>
-                <a:latin typeface="Yu Gothic" pitchFamily="34" charset="0"/>
-                <a:ea typeface="Yu Gothic" pitchFamily="34" charset="-122"/>
-                <a:cs typeface="Yu Gothic" pitchFamily="34" charset="-120"/>
+                <a:latin typeface="Hiragino Kaku Gothic ProN" pitchFamily="34" charset="0"/>
+                <a:ea typeface="Hiragino Kaku Gothic ProN" pitchFamily="34" charset="-122"/>
+                <a:cs typeface="Hiragino Kaku Gothic ProN" pitchFamily="34" charset="-120"/>
               </a:rPr>
               <a:t>内容の近さで書籍をグループ化。</a:t>
             </a:r>
-            <a:endParaRPr lang="en-US" sz="950" dirty="0"/>
+            <a:endParaRPr lang="ja-JP" sz="950" dirty="0"/>
           </a:p>
         </p:txBody>
       </p:sp>
@@ -1931,13 +1931,13 @@
               <a:buNone/>
             </a:pPr>
             <a:r>
-              <a:rPr lang="en-US" sz="900" b="1" dirty="0">
+              <a:rPr lang="ja-JP" altLang="en-US" sz="900" b="1" dirty="0">
                 <a:solidFill>
                   <a:srgbClr val="5D4E30"/>
                 </a:solidFill>
-                <a:latin typeface="Yu Gothic" pitchFamily="34" charset="0"/>
-                <a:ea typeface="Yu Gothic" pitchFamily="34" charset="-122"/>
-                <a:cs typeface="Yu Gothic" pitchFamily="34" charset="-120"/>
+                <a:latin typeface="Hiragino Kaku Gothic ProN" pitchFamily="34" charset="0"/>
+                <a:ea typeface="Hiragino Kaku Gothic ProN" pitchFamily="34" charset="-122"/>
+                <a:cs typeface="Hiragino Kaku Gothic ProN" pitchFamily="34" charset="-120"/>
               </a:rPr>
               <a:t>k の決定。</a:t>
             </a:r>
@@ -1948,17 +1948,17 @@
               <a:buNone/>
             </a:pPr>
             <a:r>
-              <a:rPr lang="en-US" sz="900" dirty="0">
+              <a:rPr lang="ja-JP" altLang="en-US" sz="900" dirty="0">
                 <a:solidFill>
                   <a:srgbClr val="5D4E30"/>
                 </a:solidFill>
-                <a:latin typeface="Yu Gothic" pitchFamily="34" charset="0"/>
-                <a:ea typeface="Yu Gothic" pitchFamily="34" charset="-122"/>
-                <a:cs typeface="Yu Gothic" pitchFamily="34" charset="-120"/>
+                <a:latin typeface="Hiragino Kaku Gothic ProN" pitchFamily="34" charset="0"/>
+                <a:ea typeface="Hiragino Kaku Gothic ProN" pitchFamily="34" charset="-122"/>
+                <a:cs typeface="Hiragino Kaku Gothic ProN" pitchFamily="34" charset="-120"/>
               </a:rPr>
               <a:t>エルボー法＋シルエット係数＋業務的な解釈性。</a:t>
             </a:r>
-            <a:endParaRPr lang="en-US" sz="900" dirty="0"/>
+            <a:endParaRPr lang="ja-JP" sz="900" dirty="0"/>
           </a:p>
         </p:txBody>
       </p:sp>
@@ -1987,17 +1987,17 @@
               <a:buNone/>
             </a:pPr>
             <a:r>
-              <a:rPr lang="en-US" sz="1400" b="1" dirty="0">
+              <a:rPr lang="ja-JP" altLang="en-US" sz="1400" b="1" dirty="0">
                 <a:solidFill>
                   <a:srgbClr val="23314F"/>
                 </a:solidFill>
-                <a:latin typeface="Yu Gothic" pitchFamily="34" charset="0"/>
-                <a:ea typeface="Yu Gothic" pitchFamily="34" charset="-122"/>
-                <a:cs typeface="Yu Gothic" pitchFamily="34" charset="-120"/>
+                <a:latin typeface="Hiragino Kaku Gothic ProN" pitchFamily="34" charset="0"/>
+                <a:ea typeface="Hiragino Kaku Gothic ProN" pitchFamily="34" charset="-122"/>
+                <a:cs typeface="Hiragino Kaku Gothic ProN" pitchFamily="34" charset="-120"/>
               </a:rPr>
               <a:t>04</a:t>
             </a:r>
-            <a:endParaRPr lang="en-US" sz="1400" dirty="0"/>
+            <a:endParaRPr lang="ja-JP" sz="1400" dirty="0"/>
           </a:p>
         </p:txBody>
       </p:sp>
@@ -2029,17 +2029,17 @@
               <a:buNone/>
             </a:pPr>
             <a:r>
-              <a:rPr lang="en-US" sz="1250" b="1" dirty="0">
+              <a:rPr lang="ja-JP" altLang="en-US" sz="1250" b="1" dirty="0">
                 <a:solidFill>
                   <a:srgbClr val="1D2536"/>
                 </a:solidFill>
-                <a:latin typeface="Yu Gothic" pitchFamily="34" charset="0"/>
-                <a:ea typeface="Yu Gothic" pitchFamily="34" charset="-122"/>
-                <a:cs typeface="Yu Gothic" pitchFamily="34" charset="-120"/>
+                <a:latin typeface="Hiragino Kaku Gothic ProN" pitchFamily="34" charset="0"/>
+                <a:ea typeface="Hiragino Kaku Gothic ProN" pitchFamily="34" charset="-122"/>
+                <a:cs typeface="Hiragino Kaku Gothic ProN" pitchFamily="34" charset="-120"/>
               </a:rPr>
               <a:t>解釈・タグ付け</a:t>
             </a:r>
-            <a:endParaRPr lang="en-US" sz="1250" dirty="0"/>
+            <a:endParaRPr lang="ja-JP" sz="1250" dirty="0"/>
           </a:p>
         </p:txBody>
       </p:sp>
@@ -2071,17 +2071,17 @@
               <a:buNone/>
             </a:pPr>
             <a:r>
-              <a:rPr lang="en-US" sz="950" dirty="0">
+              <a:rPr lang="ja-JP" altLang="en-US" sz="950" dirty="0">
                 <a:solidFill>
                   <a:srgbClr val="737D90"/>
                 </a:solidFill>
-                <a:latin typeface="Yu Gothic" pitchFamily="34" charset="0"/>
-                <a:ea typeface="Yu Gothic" pitchFamily="34" charset="-122"/>
-                <a:cs typeface="Yu Gothic" pitchFamily="34" charset="-120"/>
+                <a:latin typeface="Hiragino Kaku Gothic ProN" pitchFamily="34" charset="0"/>
+                <a:ea typeface="Hiragino Kaku Gothic ProN" pitchFamily="34" charset="-122"/>
+                <a:cs typeface="Hiragino Kaku Gothic ProN" pitchFamily="34" charset="-120"/>
               </a:rPr>
               <a:t>TF-IDF上位語などでクラスターにキーワードを付与し意味づけ。</a:t>
             </a:r>
-            <a:endParaRPr lang="en-US" sz="950" dirty="0"/>
+            <a:endParaRPr lang="ja-JP" sz="950" dirty="0"/>
           </a:p>
         </p:txBody>
       </p:sp>
@@ -2110,17 +2110,17 @@
               <a:buNone/>
             </a:pPr>
             <a:r>
-              <a:rPr lang="en-US" sz="1400" b="1" dirty="0">
+              <a:rPr lang="ja-JP" altLang="en-US" sz="1400" b="1" dirty="0">
                 <a:solidFill>
                   <a:srgbClr val="23314F"/>
                 </a:solidFill>
-                <a:latin typeface="Yu Gothic" pitchFamily="34" charset="0"/>
-                <a:ea typeface="Yu Gothic" pitchFamily="34" charset="-122"/>
-                <a:cs typeface="Yu Gothic" pitchFamily="34" charset="-120"/>
+                <a:latin typeface="Hiragino Kaku Gothic ProN" pitchFamily="34" charset="0"/>
+                <a:ea typeface="Hiragino Kaku Gothic ProN" pitchFamily="34" charset="-122"/>
+                <a:cs typeface="Hiragino Kaku Gothic ProN" pitchFamily="34" charset="-120"/>
               </a:rPr>
               <a:t>05</a:t>
             </a:r>
-            <a:endParaRPr lang="en-US" sz="1400" dirty="0"/>
+            <a:endParaRPr lang="ja-JP" sz="1400" dirty="0"/>
           </a:p>
         </p:txBody>
       </p:sp>
@@ -2152,17 +2152,17 @@
               <a:buNone/>
             </a:pPr>
             <a:r>
-              <a:rPr lang="en-US" sz="1250" b="1" dirty="0">
+              <a:rPr lang="ja-JP" altLang="en-US" sz="1250" b="1" dirty="0">
                 <a:solidFill>
                   <a:srgbClr val="1D2536"/>
                 </a:solidFill>
-                <a:latin typeface="Yu Gothic" pitchFamily="34" charset="0"/>
-                <a:ea typeface="Yu Gothic" pitchFamily="34" charset="-122"/>
-                <a:cs typeface="Yu Gothic" pitchFamily="34" charset="-120"/>
+                <a:latin typeface="Hiragino Kaku Gothic ProN" pitchFamily="34" charset="0"/>
+                <a:ea typeface="Hiragino Kaku Gothic ProN" pitchFamily="34" charset="-122"/>
+                <a:cs typeface="Hiragino Kaku Gothic ProN" pitchFamily="34" charset="-120"/>
               </a:rPr>
               <a:t>品質評価</a:t>
             </a:r>
-            <a:endParaRPr lang="en-US" sz="1250" dirty="0"/>
+            <a:endParaRPr lang="ja-JP" sz="1250" dirty="0"/>
           </a:p>
         </p:txBody>
       </p:sp>
@@ -2194,17 +2194,17 @@
               <a:buNone/>
             </a:pPr>
             <a:r>
-              <a:rPr lang="en-US" sz="950" dirty="0">
+              <a:rPr lang="ja-JP" altLang="en-US" sz="950" dirty="0">
                 <a:solidFill>
                   <a:srgbClr val="737D90"/>
                 </a:solidFill>
-                <a:latin typeface="Yu Gothic" pitchFamily="34" charset="0"/>
-                <a:ea typeface="Yu Gothic" pitchFamily="34" charset="-122"/>
-                <a:cs typeface="Yu Gothic" pitchFamily="34" charset="-120"/>
+                <a:latin typeface="Hiragino Kaku Gothic ProN" pitchFamily="34" charset="0"/>
+                <a:ea typeface="Hiragino Kaku Gothic ProN" pitchFamily="34" charset="-122"/>
+                <a:cs typeface="Hiragino Kaku Gothic ProN" pitchFamily="34" charset="-120"/>
               </a:rPr>
               <a:t>分類の純度を検証。</a:t>
             </a:r>
-            <a:endParaRPr lang="en-US" sz="950" dirty="0"/>
+            <a:endParaRPr lang="ja-JP" sz="950" dirty="0"/>
           </a:p>
         </p:txBody>
       </p:sp>
@@ -2256,13 +2256,13 @@
               <a:buNone/>
             </a:pPr>
             <a:r>
-              <a:rPr lang="en-US" sz="900" b="1" dirty="0">
+              <a:rPr lang="ja-JP" altLang="en-US" sz="900" b="1" dirty="0">
                 <a:solidFill>
                   <a:srgbClr val="5D4E30"/>
                 </a:solidFill>
-                <a:latin typeface="Yu Gothic" pitchFamily="34" charset="0"/>
-                <a:ea typeface="Yu Gothic" pitchFamily="34" charset="-122"/>
-                <a:cs typeface="Yu Gothic" pitchFamily="34" charset="-120"/>
+                <a:latin typeface="Hiragino Kaku Gothic ProN" pitchFamily="34" charset="0"/>
+                <a:ea typeface="Hiragino Kaku Gothic ProN" pitchFamily="34" charset="-122"/>
+                <a:cs typeface="Hiragino Kaku Gothic ProN" pitchFamily="34" charset="-120"/>
               </a:rPr>
               <a:t>純度＝Purity</a:t>
             </a:r>
@@ -2273,17 +2273,17 @@
               <a:buNone/>
             </a:pPr>
             <a:r>
-              <a:rPr lang="en-US" sz="900" dirty="0">
+              <a:rPr lang="ja-JP" altLang="en-US" sz="900" dirty="0">
                 <a:solidFill>
                   <a:srgbClr val="5D4E30"/>
                 </a:solidFill>
-                <a:latin typeface="Yu Gothic" pitchFamily="34" charset="0"/>
-                <a:ea typeface="Yu Gothic" pitchFamily="34" charset="-122"/>
-                <a:cs typeface="Yu Gothic" pitchFamily="34" charset="-120"/>
+                <a:latin typeface="Hiragino Kaku Gothic ProN" pitchFamily="34" charset="0"/>
+                <a:ea typeface="Hiragino Kaku Gothic ProN" pitchFamily="34" charset="-122"/>
+                <a:cs typeface="Hiragino Kaku Gothic ProN" pitchFamily="34" charset="-120"/>
               </a:rPr>
               <a:t>（クラスター内が単一ジャンルに寄る割合）。ジャンルラベルがあるため Purity / NMI / ARI で測定。</a:t>
             </a:r>
-            <a:endParaRPr lang="en-US" sz="900" dirty="0"/>
+            <a:endParaRPr lang="ja-JP" sz="900" dirty="0"/>
           </a:p>
         </p:txBody>
       </p:sp>
@@ -2312,17 +2312,17 @@
               <a:buNone/>
             </a:pPr>
             <a:r>
-              <a:rPr lang="en-US" sz="1000" b="1" spc="250" kern="0" dirty="0">
+              <a:rPr lang="ja-JP" altLang="en-US" sz="1000" b="1" spc="250" kern="0" dirty="0">
                 <a:solidFill>
                   <a:srgbClr val="AEB6C4"/>
                 </a:solidFill>
-                <a:latin typeface="Yu Gothic" pitchFamily="34" charset="0"/>
-                <a:ea typeface="Yu Gothic" pitchFamily="34" charset="-122"/>
-                <a:cs typeface="Yu Gothic" pitchFamily="34" charset="-120"/>
+                <a:latin typeface="Hiragino Kaku Gothic ProN" pitchFamily="34" charset="0"/>
+                <a:ea typeface="Hiragino Kaku Gothic ProN" pitchFamily="34" charset="-122"/>
+                <a:cs typeface="Hiragino Kaku Gothic ProN" pitchFamily="34" charset="-120"/>
               </a:rPr>
               <a:t>STEP 06–08 ｜ 売上予測</a:t>
             </a:r>
-            <a:endParaRPr lang="en-US" sz="1000" dirty="0"/>
+            <a:endParaRPr lang="ja-JP" sz="1000" dirty="0"/>
           </a:p>
         </p:txBody>
       </p:sp>
@@ -2420,17 +2420,17 @@
               <a:buNone/>
             </a:pPr>
             <a:r>
-              <a:rPr lang="en-US" sz="1400" b="1" dirty="0">
+              <a:rPr lang="ja-JP" altLang="en-US" sz="1400" b="1" dirty="0">
                 <a:solidFill>
                   <a:srgbClr val="23314F"/>
                 </a:solidFill>
-                <a:latin typeface="Yu Gothic" pitchFamily="34" charset="0"/>
-                <a:ea typeface="Yu Gothic" pitchFamily="34" charset="-122"/>
-                <a:cs typeface="Yu Gothic" pitchFamily="34" charset="-120"/>
+                <a:latin typeface="Hiragino Kaku Gothic ProN" pitchFamily="34" charset="0"/>
+                <a:ea typeface="Hiragino Kaku Gothic ProN" pitchFamily="34" charset="-122"/>
+                <a:cs typeface="Hiragino Kaku Gothic ProN" pitchFamily="34" charset="-120"/>
               </a:rPr>
               <a:t>06</a:t>
             </a:r>
-            <a:endParaRPr lang="en-US" sz="1400" dirty="0"/>
+            <a:endParaRPr lang="ja-JP" sz="1400" dirty="0"/>
           </a:p>
         </p:txBody>
       </p:sp>
@@ -2459,17 +2459,17 @@
               <a:buNone/>
             </a:pPr>
             <a:r>
-              <a:rPr lang="en-US" sz="1250" b="1" dirty="0">
+              <a:rPr lang="ja-JP" altLang="en-US" sz="1250" b="1" dirty="0">
                 <a:solidFill>
                   <a:srgbClr val="1D2536"/>
                 </a:solidFill>
-                <a:latin typeface="Yu Gothic" pitchFamily="34" charset="0"/>
-                <a:ea typeface="Yu Gothic" pitchFamily="34" charset="-122"/>
-                <a:cs typeface="Yu Gothic" pitchFamily="34" charset="-120"/>
+                <a:latin typeface="Hiragino Kaku Gothic ProN" pitchFamily="34" charset="0"/>
+                <a:ea typeface="Hiragino Kaku Gothic ProN" pitchFamily="34" charset="-122"/>
+                <a:cs typeface="Hiragino Kaku Gothic ProN" pitchFamily="34" charset="-120"/>
               </a:rPr>
               <a:t>特徴量抽出（2層）</a:t>
             </a:r>
-            <a:endParaRPr lang="en-US" sz="1250" dirty="0"/>
+            <a:endParaRPr lang="ja-JP" sz="1250" dirty="0"/>
           </a:p>
         </p:txBody>
       </p:sp>
@@ -2501,13 +2501,13 @@
               <a:buNone/>
             </a:pPr>
             <a:r>
-              <a:rPr lang="en-US" sz="950" b="1" dirty="0">
+              <a:rPr lang="ja-JP" altLang="en-US" sz="950" b="1" dirty="0">
                 <a:solidFill>
                   <a:srgbClr val="23314F"/>
                 </a:solidFill>
-                <a:latin typeface="Yu Gothic" pitchFamily="34" charset="0"/>
-                <a:ea typeface="Yu Gothic" pitchFamily="34" charset="-122"/>
-                <a:cs typeface="Yu Gothic" pitchFamily="34" charset="-120"/>
+                <a:latin typeface="Hiragino Kaku Gothic ProN" pitchFamily="34" charset="0"/>
+                <a:ea typeface="Hiragino Kaku Gothic ProN" pitchFamily="34" charset="-122"/>
+                <a:cs typeface="Hiragino Kaku Gothic ProN" pitchFamily="34" charset="-120"/>
               </a:rPr>
               <a:t>書籍 </a:t>
             </a:r>
@@ -2518,17 +2518,17 @@
               <a:buNone/>
             </a:pPr>
             <a:r>
-              <a:rPr lang="en-US" sz="950" dirty="0">
+              <a:rPr lang="ja-JP" altLang="en-US" sz="950" dirty="0">
                 <a:solidFill>
                   <a:srgbClr val="737D90"/>
                 </a:solidFill>
-                <a:latin typeface="Yu Gothic" pitchFamily="34" charset="0"/>
-                <a:ea typeface="Yu Gothic" pitchFamily="34" charset="-122"/>
-                <a:cs typeface="Yu Gothic" pitchFamily="34" charset="-120"/>
+                <a:latin typeface="Hiragino Kaku Gothic ProN" pitchFamily="34" charset="0"/>
+                <a:ea typeface="Hiragino Kaku Gothic ProN" pitchFamily="34" charset="-122"/>
+                <a:cs typeface="Hiragino Kaku Gothic ProN" pitchFamily="34" charset="-120"/>
               </a:rPr>
               <a:t> クラスターID／価格／典型度／著者／季節</a:t>
             </a:r>
-            <a:endParaRPr lang="en-US" sz="950" dirty="0"/>
+            <a:endParaRPr lang="ja-JP" sz="950" dirty="0"/>
           </a:p>
         </p:txBody>
       </p:sp>
@@ -2560,13 +2560,13 @@
               <a:buNone/>
             </a:pPr>
             <a:r>
-              <a:rPr lang="en-US" sz="950" b="1" dirty="0">
+              <a:rPr lang="ja-JP" altLang="en-US" sz="950" b="1" dirty="0">
                 <a:solidFill>
                   <a:srgbClr val="23314F"/>
                 </a:solidFill>
-                <a:latin typeface="Yu Gothic" pitchFamily="34" charset="0"/>
-                <a:ea typeface="Yu Gothic" pitchFamily="34" charset="-122"/>
-                <a:cs typeface="Yu Gothic" pitchFamily="34" charset="-120"/>
+                <a:latin typeface="Hiragino Kaku Gothic ProN" pitchFamily="34" charset="0"/>
+                <a:ea typeface="Hiragino Kaku Gothic ProN" pitchFamily="34" charset="-122"/>
+                <a:cs typeface="Hiragino Kaku Gothic ProN" pitchFamily="34" charset="-120"/>
               </a:rPr>
               <a:t>店舗 </a:t>
             </a:r>
@@ -2577,17 +2577,17 @@
               <a:buNone/>
             </a:pPr>
             <a:r>
-              <a:rPr lang="en-US" sz="950" dirty="0">
+              <a:rPr lang="ja-JP" altLang="en-US" sz="950" dirty="0">
                 <a:solidFill>
                   <a:srgbClr val="737D90"/>
                 </a:solidFill>
-                <a:latin typeface="Yu Gothic" pitchFamily="34" charset="0"/>
-                <a:ea typeface="Yu Gothic" pitchFamily="34" charset="-122"/>
-                <a:cs typeface="Yu Gothic" pitchFamily="34" charset="-120"/>
+                <a:latin typeface="Hiragino Kaku Gothic ProN" pitchFamily="34" charset="0"/>
+                <a:ea typeface="Hiragino Kaku Gothic ProN" pitchFamily="34" charset="-122"/>
+                <a:cs typeface="Hiragino Kaku Gothic ProN" pitchFamily="34" charset="-120"/>
               </a:rPr>
               <a:t> 地域／規模／立地／商圏</a:t>
             </a:r>
-            <a:endParaRPr lang="en-US" sz="950" dirty="0"/>
+            <a:endParaRPr lang="ja-JP" sz="950" dirty="0"/>
           </a:p>
         </p:txBody>
       </p:sp>
@@ -2639,13 +2639,13 @@
               <a:buNone/>
             </a:pPr>
             <a:r>
-              <a:rPr lang="en-US" sz="900" b="1" dirty="0">
+              <a:rPr lang="ja-JP" altLang="en-US" sz="900" b="1" dirty="0">
                 <a:solidFill>
                   <a:srgbClr val="7F352C"/>
                 </a:solidFill>
-                <a:latin typeface="Yu Gothic" pitchFamily="34" charset="0"/>
-                <a:ea typeface="Yu Gothic" pitchFamily="34" charset="-122"/>
-                <a:cs typeface="Yu Gothic" pitchFamily="34" charset="-120"/>
+                <a:latin typeface="Hiragino Kaku Gothic ProN" pitchFamily="34" charset="0"/>
+                <a:ea typeface="Hiragino Kaku Gothic ProN" pitchFamily="34" charset="-122"/>
+                <a:cs typeface="Hiragino Kaku Gothic ProN" pitchFamily="34" charset="-120"/>
               </a:rPr>
               <a:t>要確認。</a:t>
             </a:r>
@@ -2656,17 +2656,17 @@
               <a:buNone/>
             </a:pPr>
             <a:r>
-              <a:rPr lang="en-US" sz="900" dirty="0">
+              <a:rPr lang="ja-JP" altLang="en-US" sz="900" dirty="0">
                 <a:solidFill>
                   <a:srgbClr val="7F352C"/>
                 </a:solidFill>
-                <a:latin typeface="Yu Gothic" pitchFamily="34" charset="0"/>
-                <a:ea typeface="Yu Gothic" pitchFamily="34" charset="-122"/>
-                <a:cs typeface="Yu Gothic" pitchFamily="34" charset="-120"/>
+                <a:latin typeface="Hiragino Kaku Gothic ProN" pitchFamily="34" charset="0"/>
+                <a:ea typeface="Hiragino Kaku Gothic ProN" pitchFamily="34" charset="-122"/>
+                <a:cs typeface="Hiragino Kaku Gothic ProN" pitchFamily="34" charset="-120"/>
               </a:rPr>
               <a:t>過去実績の販売数が「供給が潤沢な状態の販売」か「供給が打ち切られた状態の販売」かを区別する必要あり。</a:t>
             </a:r>
-            <a:endParaRPr lang="en-US" sz="900" dirty="0"/>
+            <a:endParaRPr lang="ja-JP" sz="900" dirty="0"/>
           </a:p>
         </p:txBody>
       </p:sp>
@@ -2695,17 +2695,17 @@
               <a:buNone/>
             </a:pPr>
             <a:r>
-              <a:rPr lang="en-US" sz="1400" b="1" dirty="0">
+              <a:rPr lang="ja-JP" altLang="en-US" sz="1400" b="1" dirty="0">
                 <a:solidFill>
                   <a:srgbClr val="23314F"/>
                 </a:solidFill>
-                <a:latin typeface="Yu Gothic" pitchFamily="34" charset="0"/>
-                <a:ea typeface="Yu Gothic" pitchFamily="34" charset="-122"/>
-                <a:cs typeface="Yu Gothic" pitchFamily="34" charset="-120"/>
+                <a:latin typeface="Hiragino Kaku Gothic ProN" pitchFamily="34" charset="0"/>
+                <a:ea typeface="Hiragino Kaku Gothic ProN" pitchFamily="34" charset="-122"/>
+                <a:cs typeface="Hiragino Kaku Gothic ProN" pitchFamily="34" charset="-120"/>
               </a:rPr>
               <a:t>07</a:t>
             </a:r>
-            <a:endParaRPr lang="en-US" sz="1400" dirty="0"/>
+            <a:endParaRPr lang="ja-JP" sz="1400" dirty="0"/>
           </a:p>
         </p:txBody>
       </p:sp>
@@ -2734,17 +2734,17 @@
               <a:buNone/>
             </a:pPr>
             <a:r>
-              <a:rPr lang="en-US" sz="1250" b="1" dirty="0">
+              <a:rPr lang="ja-JP" altLang="en-US" sz="1250" b="1" dirty="0">
                 <a:solidFill>
                   <a:srgbClr val="1D2536"/>
                 </a:solidFill>
-                <a:latin typeface="Yu Gothic" pitchFamily="34" charset="0"/>
-                <a:ea typeface="Yu Gothic" pitchFamily="34" charset="-122"/>
-                <a:cs typeface="Yu Gothic" pitchFamily="34" charset="-120"/>
+                <a:latin typeface="Hiragino Kaku Gothic ProN" pitchFamily="34" charset="0"/>
+                <a:ea typeface="Hiragino Kaku Gothic ProN" pitchFamily="34" charset="-122"/>
+                <a:cs typeface="Hiragino Kaku Gothic ProN" pitchFamily="34" charset="-120"/>
               </a:rPr>
               <a:t>予測モデル（一本のモデル）</a:t>
             </a:r>
-            <a:endParaRPr lang="en-US" sz="1250" dirty="0"/>
+            <a:endParaRPr lang="ja-JP" sz="1250" dirty="0"/>
           </a:p>
         </p:txBody>
       </p:sp>
@@ -2773,13 +2773,13 @@
               <a:buNone/>
             </a:pPr>
             <a:r>
-              <a:rPr lang="en-US" sz="950" b="1" dirty="0">
+              <a:rPr lang="ja-JP" altLang="en-US" sz="950" b="1" dirty="0">
                 <a:solidFill>
                   <a:srgbClr val="23314F"/>
                 </a:solidFill>
-                <a:latin typeface="Yu Gothic" pitchFamily="34" charset="0"/>
-                <a:ea typeface="Yu Gothic" pitchFamily="34" charset="-122"/>
-                <a:cs typeface="Yu Gothic" pitchFamily="34" charset="-120"/>
+                <a:latin typeface="Hiragino Kaku Gothic ProN" pitchFamily="34" charset="0"/>
+                <a:ea typeface="Hiragino Kaku Gothic ProN" pitchFamily="34" charset="-122"/>
+                <a:cs typeface="Hiragino Kaku Gothic ProN" pitchFamily="34" charset="-120"/>
               </a:rPr>
               <a:t>入力 </a:t>
             </a:r>
@@ -2787,13 +2787,13 @@
               <a:buNone/>
             </a:pPr>
             <a:r>
-              <a:rPr lang="en-US" sz="950" dirty="0">
+              <a:rPr lang="ja-JP" altLang="en-US" sz="950" dirty="0">
                 <a:solidFill>
                   <a:srgbClr val="737D90"/>
                 </a:solidFill>
-                <a:latin typeface="Yu Gothic" pitchFamily="34" charset="0"/>
-                <a:ea typeface="Yu Gothic" pitchFamily="34" charset="-122"/>
-                <a:cs typeface="Yu Gothic" pitchFamily="34" charset="-120"/>
+                <a:latin typeface="Hiragino Kaku Gothic ProN" pitchFamily="34" charset="0"/>
+                <a:ea typeface="Hiragino Kaku Gothic ProN" pitchFamily="34" charset="-122"/>
+                <a:cs typeface="Hiragino Kaku Gothic ProN" pitchFamily="34" charset="-120"/>
               </a:rPr>
               <a:t> 書籍変数＋店舗変数　</a:t>
             </a:r>
@@ -2801,13 +2801,13 @@
               <a:buNone/>
             </a:pPr>
             <a:r>
-              <a:rPr lang="en-US" sz="950" b="1" dirty="0">
+              <a:rPr lang="ja-JP" altLang="en-US" sz="950" b="1" dirty="0">
                 <a:solidFill>
                   <a:srgbClr val="23314F"/>
                 </a:solidFill>
-                <a:latin typeface="Yu Gothic" pitchFamily="34" charset="0"/>
-                <a:ea typeface="Yu Gothic" pitchFamily="34" charset="-122"/>
-                <a:cs typeface="Yu Gothic" pitchFamily="34" charset="-120"/>
+                <a:latin typeface="Hiragino Kaku Gothic ProN" pitchFamily="34" charset="0"/>
+                <a:ea typeface="Hiragino Kaku Gothic ProN" pitchFamily="34" charset="-122"/>
+                <a:cs typeface="Hiragino Kaku Gothic ProN" pitchFamily="34" charset="-120"/>
               </a:rPr>
               <a:t>→ 出力 </a:t>
             </a:r>
@@ -2815,17 +2815,17 @@
               <a:buNone/>
             </a:pPr>
             <a:r>
-              <a:rPr lang="en-US" sz="950" dirty="0">
+              <a:rPr lang="ja-JP" altLang="en-US" sz="950" dirty="0">
                 <a:solidFill>
                   <a:srgbClr val="737D90"/>
                 </a:solidFill>
-                <a:latin typeface="Yu Gothic" pitchFamily="34" charset="0"/>
-                <a:ea typeface="Yu Gothic" pitchFamily="34" charset="-122"/>
-                <a:cs typeface="Yu Gothic" pitchFamily="34" charset="-120"/>
+                <a:latin typeface="Hiragino Kaku Gothic ProN" pitchFamily="34" charset="0"/>
+                <a:ea typeface="Hiragino Kaku Gothic ProN" pitchFamily="34" charset="-122"/>
+                <a:cs typeface="Hiragino Kaku Gothic ProN" pitchFamily="34" charset="-120"/>
               </a:rPr>
               <a:t> 新刊 × 店舗 の販売冊数</a:t>
             </a:r>
-            <a:endParaRPr lang="en-US" sz="950" dirty="0"/>
+            <a:endParaRPr lang="ja-JP" sz="950" dirty="0"/>
           </a:p>
         </p:txBody>
       </p:sp>
@@ -2877,13 +2877,13 @@
               <a:buNone/>
             </a:pPr>
             <a:r>
-              <a:rPr lang="en-US" sz="900" b="1" dirty="0">
+              <a:rPr lang="ja-JP" altLang="en-US" sz="900" b="1" dirty="0">
                 <a:solidFill>
                   <a:srgbClr val="5D4E30"/>
                 </a:solidFill>
-                <a:latin typeface="Yu Gothic" pitchFamily="34" charset="0"/>
-                <a:ea typeface="Yu Gothic" pitchFamily="34" charset="-122"/>
-                <a:cs typeface="Yu Gothic" pitchFamily="34" charset="-120"/>
+                <a:latin typeface="Hiragino Kaku Gothic ProN" pitchFamily="34" charset="0"/>
+                <a:ea typeface="Hiragino Kaku Gothic ProN" pitchFamily="34" charset="-122"/>
+                <a:cs typeface="Hiragino Kaku Gothic ProN" pitchFamily="34" charset="-120"/>
               </a:rPr>
               <a:t>GBDT</a:t>
             </a:r>
@@ -2894,17 +2894,17 @@
               <a:buNone/>
             </a:pPr>
             <a:r>
-              <a:rPr lang="en-US" sz="900" dirty="0">
+              <a:rPr lang="ja-JP" altLang="en-US" sz="900" dirty="0">
                 <a:solidFill>
                   <a:srgbClr val="5D4E30"/>
                 </a:solidFill>
-                <a:latin typeface="Yu Gothic" pitchFamily="34" charset="0"/>
-                <a:ea typeface="Yu Gothic" pitchFamily="34" charset="-122"/>
-                <a:cs typeface="Yu Gothic" pitchFamily="34" charset="-120"/>
+                <a:latin typeface="Hiragino Kaku Gothic ProN" pitchFamily="34" charset="0"/>
+                <a:ea typeface="Hiragino Kaku Gothic ProN" pitchFamily="34" charset="-122"/>
+                <a:cs typeface="Hiragino Kaku Gothic ProN" pitchFamily="34" charset="-120"/>
               </a:rPr>
               <a:t>等なら「料理本は地域、小説は著者」といったクラスター別の効き方も交互作用として自動学習。</a:t>
             </a:r>
-            <a:endParaRPr lang="en-US" sz="900" dirty="0"/>
+            <a:endParaRPr lang="ja-JP" sz="900" dirty="0"/>
           </a:p>
         </p:txBody>
       </p:sp>
@@ -2956,13 +2956,13 @@
               <a:buNone/>
             </a:pPr>
             <a:r>
-              <a:rPr lang="en-US" sz="900" b="1" dirty="0">
+              <a:rPr lang="ja-JP" altLang="en-US" sz="900" b="1" dirty="0">
                 <a:solidFill>
                   <a:srgbClr val="46536E"/>
                 </a:solidFill>
-                <a:latin typeface="Yu Gothic" pitchFamily="34" charset="0"/>
-                <a:ea typeface="Yu Gothic" pitchFamily="34" charset="-122"/>
-                <a:cs typeface="Yu Gothic" pitchFamily="34" charset="-120"/>
+                <a:latin typeface="Hiragino Kaku Gothic ProN" pitchFamily="34" charset="0"/>
+                <a:ea typeface="Hiragino Kaku Gothic ProN" pitchFamily="34" charset="-122"/>
+                <a:cs typeface="Hiragino Kaku Gothic ProN" pitchFamily="34" charset="-120"/>
               </a:rPr>
               <a:t>選択肢。</a:t>
             </a:r>
@@ -2973,17 +2973,17 @@
               <a:buNone/>
             </a:pPr>
             <a:r>
-              <a:rPr lang="en-US" sz="900" dirty="0">
+              <a:rPr lang="ja-JP" altLang="en-US" sz="900" dirty="0">
                 <a:solidFill>
                   <a:srgbClr val="46536E"/>
                 </a:solidFill>
-                <a:latin typeface="Yu Gothic" pitchFamily="34" charset="0"/>
-                <a:ea typeface="Yu Gothic" pitchFamily="34" charset="-122"/>
-                <a:cs typeface="Yu Gothic" pitchFamily="34" charset="-120"/>
+                <a:latin typeface="Hiragino Kaku Gothic ProN" pitchFamily="34" charset="0"/>
+                <a:ea typeface="Hiragino Kaku Gothic ProN" pitchFamily="34" charset="-122"/>
+                <a:cs typeface="Hiragino Kaku Gothic ProN" pitchFamily="34" charset="-120"/>
               </a:rPr>
               <a:t>クラスターごとに個別モデルを作る案もあり。データ量次第でメカニズム差を強く捉えうるが、実証（バックテスト）で決定。</a:t>
             </a:r>
-            <a:endParaRPr lang="en-US" sz="900" dirty="0"/>
+            <a:endParaRPr lang="ja-JP" sz="900" dirty="0"/>
           </a:p>
         </p:txBody>
       </p:sp>
@@ -3012,17 +3012,17 @@
               <a:buNone/>
             </a:pPr>
             <a:r>
-              <a:rPr lang="en-US" sz="1400" b="1" dirty="0">
+              <a:rPr lang="ja-JP" altLang="en-US" sz="1400" b="1" dirty="0">
                 <a:solidFill>
                   <a:srgbClr val="23314F"/>
                 </a:solidFill>
-                <a:latin typeface="Yu Gothic" pitchFamily="34" charset="0"/>
-                <a:ea typeface="Yu Gothic" pitchFamily="34" charset="-122"/>
-                <a:cs typeface="Yu Gothic" pitchFamily="34" charset="-120"/>
+                <a:latin typeface="Hiragino Kaku Gothic ProN" pitchFamily="34" charset="0"/>
+                <a:ea typeface="Hiragino Kaku Gothic ProN" pitchFamily="34" charset="-122"/>
+                <a:cs typeface="Hiragino Kaku Gothic ProN" pitchFamily="34" charset="-120"/>
               </a:rPr>
               <a:t>08</a:t>
             </a:r>
-            <a:endParaRPr lang="en-US" sz="1400" dirty="0"/>
+            <a:endParaRPr lang="ja-JP" sz="1400" dirty="0"/>
           </a:p>
         </p:txBody>
       </p:sp>
@@ -3051,17 +3051,17 @@
               <a:buNone/>
             </a:pPr>
             <a:r>
-              <a:rPr lang="en-US" sz="1250" b="1" dirty="0">
+              <a:rPr lang="ja-JP" altLang="en-US" sz="1250" b="1" dirty="0">
                 <a:solidFill>
                   <a:srgbClr val="1D2536"/>
                 </a:solidFill>
-                <a:latin typeface="Yu Gothic" pitchFamily="34" charset="0"/>
-                <a:ea typeface="Yu Gothic" pitchFamily="34" charset="-122"/>
-                <a:cs typeface="Yu Gothic" pitchFamily="34" charset="-120"/>
+                <a:latin typeface="Hiragino Kaku Gothic ProN" pitchFamily="34" charset="0"/>
+                <a:ea typeface="Hiragino Kaku Gothic ProN" pitchFamily="34" charset="-122"/>
+                <a:cs typeface="Hiragino Kaku Gothic ProN" pitchFamily="34" charset="-120"/>
               </a:rPr>
               <a:t>精度評価・改善</a:t>
             </a:r>
-            <a:endParaRPr lang="en-US" sz="1250" dirty="0"/>
+            <a:endParaRPr lang="ja-JP" sz="1250" dirty="0"/>
           </a:p>
         </p:txBody>
       </p:sp>
@@ -3093,17 +3093,17 @@
               <a:buNone/>
             </a:pPr>
             <a:r>
-              <a:rPr lang="en-US" sz="950" dirty="0">
+              <a:rPr lang="ja-JP" altLang="en-US" sz="950" dirty="0">
                 <a:solidFill>
                   <a:srgbClr val="737D90"/>
                 </a:solidFill>
-                <a:latin typeface="Yu Gothic" pitchFamily="34" charset="0"/>
-                <a:ea typeface="Yu Gothic" pitchFamily="34" charset="-122"/>
-                <a:cs typeface="Yu Gothic" pitchFamily="34" charset="-120"/>
+                <a:latin typeface="Hiragino Kaku Gothic ProN" pitchFamily="34" charset="0"/>
+                <a:ea typeface="Hiragino Kaku Gothic ProN" pitchFamily="34" charset="-122"/>
+                <a:cs typeface="Hiragino Kaku Gothic ProN" pitchFamily="34" charset="-120"/>
               </a:rPr>
               <a:t>過去の実販売データと照合し精度を測定・改善。</a:t>
             </a:r>
-            <a:endParaRPr lang="en-US" sz="950" dirty="0"/>
+            <a:endParaRPr lang="ja-JP" sz="950" dirty="0"/>
           </a:p>
         </p:txBody>
       </p:sp>
@@ -3155,13 +3155,13 @@
               <a:buNone/>
             </a:pPr>
             <a:r>
-              <a:rPr lang="en-US" sz="900" b="1" dirty="0">
+              <a:rPr lang="ja-JP" altLang="en-US" sz="900" b="1" dirty="0">
                 <a:solidFill>
                   <a:srgbClr val="5D4E30"/>
                 </a:solidFill>
-                <a:latin typeface="Yu Gothic" pitchFamily="34" charset="0"/>
-                <a:ea typeface="Yu Gothic" pitchFamily="34" charset="-122"/>
-                <a:cs typeface="Yu Gothic" pitchFamily="34" charset="-120"/>
+                <a:latin typeface="Hiragino Kaku Gothic ProN" pitchFamily="34" charset="0"/>
+                <a:ea typeface="Hiragino Kaku Gothic ProN" pitchFamily="34" charset="-122"/>
+                <a:cs typeface="Hiragino Kaku Gothic ProN" pitchFamily="34" charset="-120"/>
               </a:rPr>
               <a:t>時系列分割（バックテスト）</a:t>
             </a:r>
@@ -3172,17 +3172,17 @@
               <a:buNone/>
             </a:pPr>
             <a:r>
-              <a:rPr lang="en-US" sz="900" dirty="0">
+              <a:rPr lang="ja-JP" altLang="en-US" sz="900" dirty="0">
                 <a:solidFill>
                   <a:srgbClr val="5D4E30"/>
                 </a:solidFill>
-                <a:latin typeface="Yu Gothic" pitchFamily="34" charset="0"/>
-                <a:ea typeface="Yu Gothic" pitchFamily="34" charset="-122"/>
-                <a:cs typeface="Yu Gothic" pitchFamily="34" charset="-120"/>
+                <a:latin typeface="Hiragino Kaku Gothic ProN" pitchFamily="34" charset="0"/>
+                <a:ea typeface="Hiragino Kaku Gothic ProN" pitchFamily="34" charset="-122"/>
+                <a:cs typeface="Hiragino Kaku Gothic ProN" pitchFamily="34" charset="-120"/>
               </a:rPr>
               <a:t>でリーク回避。指標は MAE / RMSE / MAPE。</a:t>
             </a:r>
-            <a:endParaRPr lang="en-US" sz="900" dirty="0"/>
+            <a:endParaRPr lang="ja-JP" sz="900" dirty="0"/>
           </a:p>
         </p:txBody>
       </p:sp>
@@ -3254,17 +3254,17 @@
               <a:buNone/>
             </a:pPr>
             <a:r>
-              <a:rPr lang="en-US" sz="900" dirty="0">
+              <a:rPr lang="ja-JP" altLang="en-US" sz="900" dirty="0">
                 <a:solidFill>
                   <a:srgbClr val="737D90"/>
                 </a:solidFill>
-                <a:latin typeface="Yu Gothic" pitchFamily="34" charset="0"/>
-                <a:ea typeface="Yu Gothic" pitchFamily="34" charset="-122"/>
-                <a:cs typeface="Yu Gothic" pitchFamily="34" charset="-120"/>
+                <a:latin typeface="Hiragino Kaku Gothic ProN" pitchFamily="34" charset="0"/>
+                <a:ea typeface="Hiragino Kaku Gothic ProN" pitchFamily="34" charset="-122"/>
+                <a:cs typeface="Hiragino Kaku Gothic ProN" pitchFamily="34" charset="-120"/>
               </a:rPr>
               <a:t>重要ポイント・想定</a:t>
             </a:r>
-            <a:endParaRPr lang="en-US" sz="900" dirty="0"/>
+            <a:endParaRPr lang="ja-JP" sz="900" dirty="0"/>
           </a:p>
         </p:txBody>
       </p:sp>
@@ -3313,17 +3313,17 @@
               <a:buNone/>
             </a:pPr>
             <a:r>
-              <a:rPr lang="en-US" sz="900" dirty="0">
+              <a:rPr lang="ja-JP" altLang="en-US" sz="900" dirty="0">
                 <a:solidFill>
                   <a:srgbClr val="737D90"/>
                 </a:solidFill>
-                <a:latin typeface="Yu Gothic" pitchFamily="34" charset="0"/>
-                <a:ea typeface="Yu Gothic" pitchFamily="34" charset="-122"/>
-                <a:cs typeface="Yu Gothic" pitchFamily="34" charset="-120"/>
+                <a:latin typeface="Hiragino Kaku Gothic ProN" pitchFamily="34" charset="0"/>
+                <a:ea typeface="Hiragino Kaku Gothic ProN" pitchFamily="34" charset="-122"/>
+                <a:cs typeface="Hiragino Kaku Gothic ProN" pitchFamily="34" charset="-120"/>
               </a:rPr>
               <a:t>設計上の選択肢</a:t>
             </a:r>
-            <a:endParaRPr lang="en-US" sz="900" dirty="0"/>
+            <a:endParaRPr lang="ja-JP" sz="900" dirty="0"/>
           </a:p>
         </p:txBody>
       </p:sp>
@@ -3372,17 +3372,17 @@
               <a:buNone/>
             </a:pPr>
             <a:r>
-              <a:rPr lang="en-US" sz="900" dirty="0">
+              <a:rPr lang="ja-JP" altLang="en-US" sz="900" dirty="0">
                 <a:solidFill>
                   <a:srgbClr val="737D90"/>
                 </a:solidFill>
-                <a:latin typeface="Yu Gothic" pitchFamily="34" charset="0"/>
-                <a:ea typeface="Yu Gothic" pitchFamily="34" charset="-122"/>
-                <a:cs typeface="Yu Gothic" pitchFamily="34" charset="-120"/>
+                <a:latin typeface="Hiragino Kaku Gothic ProN" pitchFamily="34" charset="0"/>
+                <a:ea typeface="Hiragino Kaku Gothic ProN" pitchFamily="34" charset="-122"/>
+                <a:cs typeface="Hiragino Kaku Gothic ProN" pitchFamily="34" charset="-120"/>
               </a:rPr>
               <a:t>要確認</a:t>
             </a:r>
-            <a:endParaRPr lang="en-US" sz="900" dirty="0"/>
+            <a:endParaRPr lang="ja-JP" sz="900" dirty="0"/>
           </a:p>
         </p:txBody>
       </p:sp>
@@ -3411,17 +3411,17 @@
               <a:buNone/>
             </a:pPr>
             <a:r>
-              <a:rPr lang="en-US" sz="900" dirty="0">
+              <a:rPr lang="ja-JP" altLang="en-US" sz="900" dirty="0">
                 <a:solidFill>
                   <a:srgbClr val="AEB6C4"/>
                 </a:solidFill>
-                <a:latin typeface="Yu Gothic" pitchFamily="34" charset="0"/>
-                <a:ea typeface="Yu Gothic" pitchFamily="34" charset="-122"/>
-                <a:cs typeface="Yu Gothic" pitchFamily="34" charset="-120"/>
+                <a:latin typeface="Hiragino Kaku Gothic ProN" pitchFamily="34" charset="0"/>
+                <a:ea typeface="Hiragino Kaku Gothic ProN" pitchFamily="34" charset="-122"/>
+                <a:cs typeface="Hiragino Kaku Gothic ProN" pitchFamily="34" charset="-120"/>
               </a:rPr>
               <a:t>現状ロジックの中立的な整理（改善の方向性は次フェーズ）</a:t>
             </a:r>
-            <a:endParaRPr lang="en-US" sz="900" dirty="0"/>
+            <a:endParaRPr lang="ja-JP" sz="900" dirty="0"/>
           </a:p>
         </p:txBody>
       </p:sp>
